--- a/output/wordlabs-pro-prefix-3day.pptx
+++ b/output/wordlabs-pro-prefix-3day.pptx
@@ -4240,7 +4240,7 @@
                 <a:ea typeface="Calibri" pitchFamily="34" charset="-122"/>
                 <a:cs typeface="Calibri" pitchFamily="34" charset="-120"/>
               </a:rPr>
-              <a:t>"forward, in favour of"</a:t>
+              <a:t>"forward, before, in favour of"</a:t>
             </a:r>
             <a:endParaRPr lang="en-US" sz="2200" dirty="0"/>
           </a:p>
@@ -5288,7 +5288,7 @@
                 <a:ea typeface="Calibri" pitchFamily="34" charset="-122"/>
                 <a:cs typeface="Calibri" pitchFamily="34" charset="-120"/>
               </a:rPr>
-              <a:t>Word Labs  •  wordlabs.app  •  Prefix: 'pro-' = forward, in favour of</a:t>
+              <a:t>Word Labs  •  wordlabs.app  •  Prefix: 'pro-' = forward, before, in favour of</a:t>
             </a:r>
             <a:endParaRPr lang="en-US" sz="800" dirty="0"/>
           </a:p>
@@ -5928,7 +5928,7 @@
                 <a:ea typeface="Calibri" pitchFamily="34" charset="-122"/>
                 <a:cs typeface="Calibri" pitchFamily="34" charset="-120"/>
               </a:rPr>
-              <a:t>Word Labs  •  wordlabs.app  •  Prefix: 'pro-' = forward, in favour of</a:t>
+              <a:t>Word Labs  •  wordlabs.app  •  Prefix: 'pro-' = forward, before, in favour of</a:t>
             </a:r>
             <a:endParaRPr lang="en-US" sz="800" dirty="0"/>
           </a:p>
@@ -6040,7 +6040,7 @@
                 <a:ea typeface="Calibri" pitchFamily="34" charset="-122"/>
                 <a:cs typeface="Calibri" pitchFamily="34" charset="-120"/>
               </a:rPr>
-              <a:t>The team made great </a:t>
+              <a:t>The teacher asked us to </a:t>
             </a:r>
             <a:pPr algn="l" indent="0" marL="0">
               <a:buNone/>
@@ -6057,7 +6057,7 @@
                 <a:ea typeface="Calibri" pitchFamily="34" charset="-122"/>
                 <a:cs typeface="Calibri" pitchFamily="34" charset="-120"/>
               </a:rPr>
-              <a:t>progress</a:t>
+              <a:t>protect</a:t>
             </a:r>
             <a:pPr algn="l" indent="0" marL="0">
               <a:buNone/>
@@ -6071,7 +6071,7 @@
                 <a:ea typeface="Calibri" pitchFamily="34" charset="-122"/>
                 <a:cs typeface="Calibri" pitchFamily="34" charset="-120"/>
               </a:rPr>
-              <a:t> and their coach was proud to </a:t>
+              <a:t> our work and show our </a:t>
             </a:r>
             <a:pPr algn="l" indent="0" marL="0">
               <a:buNone/>
@@ -6088,7 +6088,7 @@
                 <a:ea typeface="Calibri" pitchFamily="34" charset="-122"/>
                 <a:cs typeface="Calibri" pitchFamily="34" charset="-120"/>
               </a:rPr>
-              <a:t>promote</a:t>
+              <a:t>progress</a:t>
             </a:r>
             <a:pPr algn="l" indent="0" marL="0">
               <a:buNone/>
@@ -6102,7 +6102,7 @@
                 <a:ea typeface="Calibri" pitchFamily="34" charset="-122"/>
                 <a:cs typeface="Calibri" pitchFamily="34" charset="-120"/>
               </a:rPr>
-              <a:t> them to the next level.</a:t>
+              <a:t>.</a:t>
             </a:r>
             <a:endParaRPr lang="en-US" sz="1800" dirty="0"/>
           </a:p>
@@ -6257,7 +6257,7 @@
                 <a:ea typeface="Trebuchet MS" pitchFamily="34" charset="-122"/>
                 <a:cs typeface="Trebuchet MS" pitchFamily="34" charset="-120"/>
               </a:rPr>
-              <a:t>progress</a:t>
+              <a:t>protect</a:t>
             </a:r>
             <a:endParaRPr lang="en-US" sz="1400" dirty="0"/>
           </a:p>
@@ -6385,7 +6385,7 @@
                 <a:ea typeface="Trebuchet MS" pitchFamily="34" charset="-122"/>
                 <a:cs typeface="Trebuchet MS" pitchFamily="34" charset="-120"/>
               </a:rPr>
-              <a:t>promote</a:t>
+              <a:t>progress</a:t>
             </a:r>
             <a:endParaRPr lang="en-US" sz="1400" dirty="0"/>
           </a:p>
@@ -6716,7 +6716,7 @@
                 <a:ea typeface="Calibri" pitchFamily="34" charset="-122"/>
                 <a:cs typeface="Calibri" pitchFamily="34" charset="-120"/>
               </a:rPr>
-              <a:t>Word Labs  •  wordlabs.app  •  Prefix: 'pro-' = forward, in favour of</a:t>
+              <a:t>Word Labs  •  wordlabs.app  •  Prefix: 'pro-' = forward, before, in favour of</a:t>
             </a:r>
             <a:endParaRPr lang="en-US" sz="800" dirty="0"/>
           </a:p>
@@ -6855,7 +6855,7 @@
                 <a:ea typeface="Trebuchet MS" pitchFamily="34" charset="-122"/>
                 <a:cs typeface="Trebuchet MS" pitchFamily="34" charset="-120"/>
               </a:rPr>
-              <a:t>progress</a:t>
+              <a:t>protect</a:t>
             </a:r>
             <a:endParaRPr lang="en-US" sz="2800" dirty="0"/>
           </a:p>
@@ -7543,7 +7543,7 @@
                 <a:ea typeface="Calibri" pitchFamily="34" charset="-122"/>
                 <a:cs typeface="Calibri" pitchFamily="34" charset="-120"/>
               </a:rPr>
-              <a:t>Word Labs  •  wordlabs.app  •  Prefix: 'pro-' = forward, in favour of</a:t>
+              <a:t>Word Labs  •  wordlabs.app  •  Prefix: 'pro-' = forward, before, in favour of</a:t>
             </a:r>
             <a:endParaRPr lang="en-US" sz="800" dirty="0"/>
           </a:p>
@@ -7682,7 +7682,7 @@
                 <a:ea typeface="Trebuchet MS" pitchFamily="34" charset="-122"/>
                 <a:cs typeface="Trebuchet MS" pitchFamily="34" charset="-120"/>
               </a:rPr>
-              <a:t>progress</a:t>
+              <a:t>protect</a:t>
             </a:r>
             <a:endParaRPr lang="en-US" sz="2800" dirty="0"/>
           </a:p>
@@ -7860,7 +7860,7 @@
                 <a:ea typeface="Calibri" pitchFamily="34" charset="-122"/>
                 <a:cs typeface="Calibri" pitchFamily="34" charset="-120"/>
               </a:rPr>
-              <a:t>forward</a:t>
+              <a:t>before, in front of</a:t>
             </a:r>
             <a:endParaRPr lang="en-US" sz="850" dirty="0"/>
           </a:p>
@@ -7933,7 +7933,7 @@
                 <a:ea typeface="Trebuchet MS" pitchFamily="34" charset="-122"/>
                 <a:cs typeface="Trebuchet MS" pitchFamily="34" charset="-120"/>
               </a:rPr>
-              <a:t>gress</a:t>
+              <a:t>tect</a:t>
             </a:r>
             <a:endParaRPr lang="en-US" sz="1300" dirty="0"/>
           </a:p>
@@ -7972,7 +7972,7 @@
                 <a:ea typeface="Calibri" pitchFamily="34" charset="-122"/>
                 <a:cs typeface="Calibri" pitchFamily="34" charset="-120"/>
               </a:rPr>
-              <a:t>to step or walk</a:t>
+              <a:t>cover, shield</a:t>
             </a:r>
             <a:endParaRPr lang="en-US" sz="850" dirty="0"/>
           </a:p>
@@ -8528,7 +8528,7 @@
                 <a:ea typeface="Calibri" pitchFamily="34" charset="-122"/>
                 <a:cs typeface="Calibri" pitchFamily="34" charset="-120"/>
               </a:rPr>
-              <a:t>Word Labs  •  wordlabs.app  •  Prefix: 'pro-' = forward, in favour of</a:t>
+              <a:t>Word Labs  •  wordlabs.app  •  Prefix: 'pro-' = forward, before, in favour of</a:t>
             </a:r>
             <a:endParaRPr lang="en-US" sz="800" dirty="0"/>
           </a:p>
@@ -8667,7 +8667,7 @@
                 <a:ea typeface="Trebuchet MS" pitchFamily="34" charset="-122"/>
                 <a:cs typeface="Trebuchet MS" pitchFamily="34" charset="-120"/>
               </a:rPr>
-              <a:t>progress</a:t>
+              <a:t>protect</a:t>
             </a:r>
             <a:endParaRPr lang="en-US" sz="2800" dirty="0"/>
           </a:p>
@@ -8845,7 +8845,7 @@
                 <a:ea typeface="Calibri" pitchFamily="34" charset="-122"/>
                 <a:cs typeface="Calibri" pitchFamily="34" charset="-120"/>
               </a:rPr>
-              <a:t>forward</a:t>
+              <a:t>before, in front of</a:t>
             </a:r>
             <a:endParaRPr lang="en-US" sz="850" dirty="0"/>
           </a:p>
@@ -8918,7 +8918,7 @@
                 <a:ea typeface="Trebuchet MS" pitchFamily="34" charset="-122"/>
                 <a:cs typeface="Trebuchet MS" pitchFamily="34" charset="-120"/>
               </a:rPr>
-              <a:t>gress</a:t>
+              <a:t>tect</a:t>
             </a:r>
             <a:endParaRPr lang="en-US" sz="1300" dirty="0"/>
           </a:p>
@@ -8957,7 +8957,7 @@
                 <a:ea typeface="Calibri" pitchFamily="34" charset="-122"/>
                 <a:cs typeface="Calibri" pitchFamily="34" charset="-120"/>
               </a:rPr>
-              <a:t>to step or walk</a:t>
+              <a:t>cover, shield</a:t>
             </a:r>
             <a:endParaRPr lang="en-US" sz="850" dirty="0"/>
           </a:p>
@@ -9221,7 +9221,7 @@
                 <a:ea typeface="Trebuchet MS" pitchFamily="34" charset="-122"/>
                 <a:cs typeface="Trebuchet MS" pitchFamily="34" charset="-120"/>
               </a:rPr>
-              <a:t>gress</a:t>
+              <a:t>tect</a:t>
             </a:r>
             <a:endParaRPr lang="en-US" sz="1400" dirty="0"/>
           </a:p>
@@ -9645,7 +9645,7 @@
                 <a:ea typeface="Calibri" pitchFamily="34" charset="-122"/>
                 <a:cs typeface="Calibri" pitchFamily="34" charset="-120"/>
               </a:rPr>
-              <a:t>Word Labs  •  wordlabs.app  •  Prefix: 'pro-' = forward, in favour of</a:t>
+              <a:t>Word Labs  •  wordlabs.app  •  Prefix: 'pro-' = forward, before, in favour of</a:t>
             </a:r>
             <a:endParaRPr lang="en-US" sz="800" dirty="0"/>
           </a:p>
@@ -9784,7 +9784,7 @@
                 <a:ea typeface="Trebuchet MS" pitchFamily="34" charset="-122"/>
                 <a:cs typeface="Trebuchet MS" pitchFamily="34" charset="-120"/>
               </a:rPr>
-              <a:t>progress</a:t>
+              <a:t>protect</a:t>
             </a:r>
             <a:endParaRPr lang="en-US" sz="2800" dirty="0"/>
           </a:p>
@@ -9962,7 +9962,7 @@
                 <a:ea typeface="Calibri" pitchFamily="34" charset="-122"/>
                 <a:cs typeface="Calibri" pitchFamily="34" charset="-120"/>
               </a:rPr>
-              <a:t>forward</a:t>
+              <a:t>before, in front of</a:t>
             </a:r>
             <a:endParaRPr lang="en-US" sz="850" dirty="0"/>
           </a:p>
@@ -10035,7 +10035,7 @@
                 <a:ea typeface="Trebuchet MS" pitchFamily="34" charset="-122"/>
                 <a:cs typeface="Trebuchet MS" pitchFamily="34" charset="-120"/>
               </a:rPr>
-              <a:t>gress</a:t>
+              <a:t>tect</a:t>
             </a:r>
             <a:endParaRPr lang="en-US" sz="1300" dirty="0"/>
           </a:p>
@@ -10074,7 +10074,7 @@
                 <a:ea typeface="Calibri" pitchFamily="34" charset="-122"/>
                 <a:cs typeface="Calibri" pitchFamily="34" charset="-120"/>
               </a:rPr>
-              <a:t>to step or walk</a:t>
+              <a:t>cover, shield</a:t>
             </a:r>
             <a:endParaRPr lang="en-US" sz="850" dirty="0"/>
           </a:p>
@@ -10338,7 +10338,7 @@
                 <a:ea typeface="Trebuchet MS" pitchFamily="34" charset="-122"/>
                 <a:cs typeface="Trebuchet MS" pitchFamily="34" charset="-120"/>
               </a:rPr>
-              <a:t>gress</a:t>
+              <a:t>tect</a:t>
             </a:r>
             <a:endParaRPr lang="en-US" sz="1400" dirty="0"/>
           </a:p>
@@ -10629,7 +10629,7 @@
                 <a:ea typeface="Trebuchet MS" pitchFamily="34" charset="-122"/>
                 <a:cs typeface="Trebuchet MS" pitchFamily="34" charset="-120"/>
               </a:rPr>
-              <a:t>gr</a:t>
+              <a:t>t</a:t>
             </a:r>
             <a:endParaRPr lang="en-US" sz="900" dirty="0"/>
           </a:p>
@@ -10761,7 +10761,7 @@
                 <a:ea typeface="Trebuchet MS" pitchFamily="34" charset="-122"/>
                 <a:cs typeface="Trebuchet MS" pitchFamily="34" charset="-120"/>
               </a:rPr>
-              <a:t>ss</a:t>
+              <a:t>ct</a:t>
             </a:r>
             <a:endParaRPr lang="en-US" sz="900" dirty="0"/>
           </a:p>
@@ -11053,7 +11053,7 @@
                 <a:ea typeface="Calibri" pitchFamily="34" charset="-122"/>
                 <a:cs typeface="Calibri" pitchFamily="34" charset="-120"/>
               </a:rPr>
-              <a:t>Word Labs  •  wordlabs.app  •  Prefix: 'pro-' = forward, in favour of</a:t>
+              <a:t>Word Labs  •  wordlabs.app  •  Prefix: 'pro-' = forward, before, in favour of</a:t>
             </a:r>
             <a:endParaRPr lang="en-US" sz="800" dirty="0"/>
           </a:p>
@@ -11192,7 +11192,7 @@
                 <a:ea typeface="Trebuchet MS" pitchFamily="34" charset="-122"/>
                 <a:cs typeface="Trebuchet MS" pitchFamily="34" charset="-120"/>
               </a:rPr>
-              <a:t>promote</a:t>
+              <a:t>progress</a:t>
             </a:r>
             <a:endParaRPr lang="en-US" sz="2800" dirty="0"/>
           </a:p>
@@ -11880,7 +11880,7 @@
                 <a:ea typeface="Calibri" pitchFamily="34" charset="-122"/>
                 <a:cs typeface="Calibri" pitchFamily="34" charset="-120"/>
               </a:rPr>
-              <a:t>Word Labs  •  wordlabs.app  •  Prefix: 'pro-' = forward, in favour of</a:t>
+              <a:t>Word Labs  •  wordlabs.app  •  Prefix: 'pro-' = forward, before, in favour of</a:t>
             </a:r>
             <a:endParaRPr lang="en-US" sz="800" dirty="0"/>
           </a:p>
@@ -12019,7 +12019,7 @@
                 <a:ea typeface="Trebuchet MS" pitchFamily="34" charset="-122"/>
                 <a:cs typeface="Trebuchet MS" pitchFamily="34" charset="-120"/>
               </a:rPr>
-              <a:t>promote</a:t>
+              <a:t>progress</a:t>
             </a:r>
             <a:endParaRPr lang="en-US" sz="2800" dirty="0"/>
           </a:p>
@@ -12270,7 +12270,7 @@
                 <a:ea typeface="Trebuchet MS" pitchFamily="34" charset="-122"/>
                 <a:cs typeface="Trebuchet MS" pitchFamily="34" charset="-120"/>
               </a:rPr>
-              <a:t>mote</a:t>
+              <a:t>gress</a:t>
             </a:r>
             <a:endParaRPr lang="en-US" sz="1300" dirty="0"/>
           </a:p>
@@ -12309,7 +12309,7 @@
                 <a:ea typeface="Calibri" pitchFamily="34" charset="-122"/>
                 <a:cs typeface="Calibri" pitchFamily="34" charset="-120"/>
               </a:rPr>
-              <a:t>to move</a:t>
+              <a:t>step, go</a:t>
             </a:r>
             <a:endParaRPr lang="en-US" sz="850" dirty="0"/>
           </a:p>
@@ -12865,7 +12865,7 @@
                 <a:ea typeface="Calibri" pitchFamily="34" charset="-122"/>
                 <a:cs typeface="Calibri" pitchFamily="34" charset="-120"/>
               </a:rPr>
-              <a:t>Word Labs  •  wordlabs.app  •  Prefix: 'pro-' = forward, in favour of</a:t>
+              <a:t>Word Labs  •  wordlabs.app  •  Prefix: 'pro-' = forward, before, in favour of</a:t>
             </a:r>
             <a:endParaRPr lang="en-US" sz="800" dirty="0"/>
           </a:p>
@@ -13004,7 +13004,7 @@
                 <a:ea typeface="Trebuchet MS" pitchFamily="34" charset="-122"/>
                 <a:cs typeface="Trebuchet MS" pitchFamily="34" charset="-120"/>
               </a:rPr>
-              <a:t>promote</a:t>
+              <a:t>progress</a:t>
             </a:r>
             <a:endParaRPr lang="en-US" sz="2800" dirty="0"/>
           </a:p>
@@ -13255,7 +13255,7 @@
                 <a:ea typeface="Trebuchet MS" pitchFamily="34" charset="-122"/>
                 <a:cs typeface="Trebuchet MS" pitchFamily="34" charset="-120"/>
               </a:rPr>
-              <a:t>mote</a:t>
+              <a:t>gress</a:t>
             </a:r>
             <a:endParaRPr lang="en-US" sz="1300" dirty="0"/>
           </a:p>
@@ -13294,7 +13294,7 @@
                 <a:ea typeface="Calibri" pitchFamily="34" charset="-122"/>
                 <a:cs typeface="Calibri" pitchFamily="34" charset="-120"/>
               </a:rPr>
-              <a:t>to move</a:t>
+              <a:t>step, go</a:t>
             </a:r>
             <a:endParaRPr lang="en-US" sz="850" dirty="0"/>
           </a:p>
@@ -13558,7 +13558,7 @@
                 <a:ea typeface="Trebuchet MS" pitchFamily="34" charset="-122"/>
                 <a:cs typeface="Trebuchet MS" pitchFamily="34" charset="-120"/>
               </a:rPr>
-              <a:t>mote</a:t>
+              <a:t>gress</a:t>
             </a:r>
             <a:endParaRPr lang="en-US" sz="1400" dirty="0"/>
           </a:p>
@@ -13891,7 +13891,7 @@
                 <a:ea typeface="Calibri" pitchFamily="34" charset="-122"/>
                 <a:cs typeface="Calibri" pitchFamily="34" charset="-120"/>
               </a:rPr>
-              <a:t>Prefix 'pro-' — forward, in favour of</a:t>
+              <a:t>Prefix 'pro-' — forward, before, in favour of</a:t>
             </a:r>
             <a:endParaRPr lang="en-US" sz="1600" dirty="0"/>
           </a:p>
@@ -14247,7 +14247,7 @@
                 <a:ea typeface="Calibri" pitchFamily="34" charset="-122"/>
                 <a:cs typeface="Calibri" pitchFamily="34" charset="-120"/>
               </a:rPr>
-              <a:t>Word Labs  •  wordlabs.app  •  Prefix: 'pro-' = forward, in favour of</a:t>
+              <a:t>Word Labs  •  wordlabs.app  •  Prefix: 'pro-' = forward, before, in favour of</a:t>
             </a:r>
             <a:endParaRPr lang="en-US" sz="800" dirty="0"/>
           </a:p>
@@ -14386,7 +14386,7 @@
                 <a:ea typeface="Trebuchet MS" pitchFamily="34" charset="-122"/>
                 <a:cs typeface="Trebuchet MS" pitchFamily="34" charset="-120"/>
               </a:rPr>
-              <a:t>promote</a:t>
+              <a:t>progress</a:t>
             </a:r>
             <a:endParaRPr lang="en-US" sz="2800" dirty="0"/>
           </a:p>
@@ -14637,7 +14637,7 @@
                 <a:ea typeface="Trebuchet MS" pitchFamily="34" charset="-122"/>
                 <a:cs typeface="Trebuchet MS" pitchFamily="34" charset="-120"/>
               </a:rPr>
-              <a:t>mote</a:t>
+              <a:t>gress</a:t>
             </a:r>
             <a:endParaRPr lang="en-US" sz="1300" dirty="0"/>
           </a:p>
@@ -14676,7 +14676,7 @@
                 <a:ea typeface="Calibri" pitchFamily="34" charset="-122"/>
                 <a:cs typeface="Calibri" pitchFamily="34" charset="-120"/>
               </a:rPr>
-              <a:t>to move</a:t>
+              <a:t>step, go</a:t>
             </a:r>
             <a:endParaRPr lang="en-US" sz="850" dirty="0"/>
           </a:p>
@@ -14940,7 +14940,7 @@
                 <a:ea typeface="Trebuchet MS" pitchFamily="34" charset="-122"/>
                 <a:cs typeface="Trebuchet MS" pitchFamily="34" charset="-120"/>
               </a:rPr>
-              <a:t>mote</a:t>
+              <a:t>gress</a:t>
             </a:r>
             <a:endParaRPr lang="en-US" sz="1400" dirty="0"/>
           </a:p>
@@ -15231,7 +15231,7 @@
                 <a:ea typeface="Trebuchet MS" pitchFamily="34" charset="-122"/>
                 <a:cs typeface="Trebuchet MS" pitchFamily="34" charset="-120"/>
               </a:rPr>
-              <a:t>m</a:t>
+              <a:t>gr</a:t>
             </a:r>
             <a:endParaRPr lang="en-US" sz="900" dirty="0"/>
           </a:p>
@@ -15297,7 +15297,7 @@
                 <a:ea typeface="Trebuchet MS" pitchFamily="34" charset="-122"/>
                 <a:cs typeface="Trebuchet MS" pitchFamily="34" charset="-120"/>
               </a:rPr>
-              <a:t>o</a:t>
+              <a:t>e</a:t>
             </a:r>
             <a:endParaRPr lang="en-US" sz="900" dirty="0"/>
           </a:p>
@@ -15363,7 +15363,7 @@
                 <a:ea typeface="Trebuchet MS" pitchFamily="34" charset="-122"/>
                 <a:cs typeface="Trebuchet MS" pitchFamily="34" charset="-120"/>
               </a:rPr>
-              <a:t>te</a:t>
+              <a:t>ss</a:t>
             </a:r>
             <a:endParaRPr lang="en-US" sz="900" dirty="0"/>
           </a:p>
@@ -15937,7 +15937,7 @@
                 <a:ea typeface="Calibri" pitchFamily="34" charset="-122"/>
                 <a:cs typeface="Calibri" pitchFamily="34" charset="-120"/>
               </a:rPr>
-              <a:t>Word Labs  •  wordlabs.app  •  Prefix: 'pro-' = forward, in favour of</a:t>
+              <a:t>Word Labs  •  wordlabs.app  •  Prefix: 'pro-' = forward, before, in favour of</a:t>
             </a:r>
             <a:endParaRPr lang="en-US" sz="800" dirty="0"/>
           </a:p>
@@ -16577,7 +16577,7 @@
                 <a:ea typeface="Calibri" pitchFamily="34" charset="-122"/>
                 <a:cs typeface="Calibri" pitchFamily="34" charset="-120"/>
               </a:rPr>
-              <a:t>Word Labs  •  wordlabs.app  •  Prefix: 'pro-' = forward, in favour of</a:t>
+              <a:t>Word Labs  •  wordlabs.app  •  Prefix: 'pro-' = forward, before, in favour of</a:t>
             </a:r>
             <a:endParaRPr lang="en-US" sz="800" dirty="0"/>
           </a:p>
@@ -16689,7 +16689,7 @@
                 <a:ea typeface="Calibri" pitchFamily="34" charset="-122"/>
                 <a:cs typeface="Calibri" pitchFamily="34" charset="-120"/>
               </a:rPr>
-              <a:t>During the </a:t>
+              <a:t>She will </a:t>
             </a:r>
             <a:pPr algn="l" indent="0" marL="0">
               <a:buNone/>
@@ -16706,7 +16706,7 @@
                 <a:ea typeface="Calibri" pitchFamily="34" charset="-122"/>
                 <a:cs typeface="Calibri" pitchFamily="34" charset="-120"/>
               </a:rPr>
-              <a:t>protest</a:t>
+              <a:t>promote</a:t>
             </a:r>
             <a:pPr algn="l" indent="0" marL="0">
               <a:buNone/>
@@ -16720,7 +16720,7 @@
                 <a:ea typeface="Calibri" pitchFamily="34" charset="-122"/>
                 <a:cs typeface="Calibri" pitchFamily="34" charset="-120"/>
               </a:rPr>
-              <a:t>, the students chose to </a:t>
+              <a:t> the event, </a:t>
             </a:r>
             <a:pPr algn="l" indent="0" marL="0">
               <a:buNone/>
@@ -16737,7 +16737,7 @@
                 <a:ea typeface="Calibri" pitchFamily="34" charset="-122"/>
                 <a:cs typeface="Calibri" pitchFamily="34" charset="-120"/>
               </a:rPr>
-              <a:t>proclaim</a:t>
+              <a:t>provide</a:t>
             </a:r>
             <a:pPr algn="l" indent="0" marL="0">
               <a:buNone/>
@@ -16751,7 +16751,7 @@
                 <a:ea typeface="Calibri" pitchFamily="34" charset="-122"/>
                 <a:cs typeface="Calibri" pitchFamily="34" charset="-120"/>
               </a:rPr>
-              <a:t> their support and </a:t>
+              <a:t> the equipment, and </a:t>
             </a:r>
             <a:pPr algn="l" indent="0" marL="0">
               <a:buNone/>
@@ -16768,7 +16768,7 @@
                 <a:ea typeface="Calibri" pitchFamily="34" charset="-122"/>
                 <a:cs typeface="Calibri" pitchFamily="34" charset="-120"/>
               </a:rPr>
-              <a:t>provide</a:t>
+              <a:t>produce</a:t>
             </a:r>
             <a:pPr algn="l" indent="0" marL="0">
               <a:buNone/>
@@ -16782,7 +16782,7 @@
                 <a:ea typeface="Calibri" pitchFamily="34" charset="-122"/>
                 <a:cs typeface="Calibri" pitchFamily="34" charset="-120"/>
               </a:rPr>
-              <a:t> ideas for change.</a:t>
+              <a:t> a wonderful show.</a:t>
             </a:r>
             <a:endParaRPr lang="en-US" sz="1800" dirty="0"/>
           </a:p>
@@ -16937,7 +16937,7 @@
                 <a:ea typeface="Trebuchet MS" pitchFamily="34" charset="-122"/>
                 <a:cs typeface="Trebuchet MS" pitchFamily="34" charset="-120"/>
               </a:rPr>
-              <a:t>protest</a:t>
+              <a:t>promote</a:t>
             </a:r>
             <a:endParaRPr lang="en-US" sz="1400" dirty="0"/>
           </a:p>
@@ -17065,7 +17065,7 @@
                 <a:ea typeface="Trebuchet MS" pitchFamily="34" charset="-122"/>
                 <a:cs typeface="Trebuchet MS" pitchFamily="34" charset="-120"/>
               </a:rPr>
-              <a:t>proclaim</a:t>
+              <a:t>provide</a:t>
             </a:r>
             <a:endParaRPr lang="en-US" sz="1400" dirty="0"/>
           </a:p>
@@ -17193,7 +17193,7 @@
                 <a:ea typeface="Trebuchet MS" pitchFamily="34" charset="-122"/>
                 <a:cs typeface="Trebuchet MS" pitchFamily="34" charset="-120"/>
               </a:rPr>
-              <a:t>provide</a:t>
+              <a:t>produce</a:t>
             </a:r>
             <a:endParaRPr lang="en-US" sz="1400" dirty="0"/>
           </a:p>
@@ -17524,7 +17524,7 @@
                 <a:ea typeface="Calibri" pitchFamily="34" charset="-122"/>
                 <a:cs typeface="Calibri" pitchFamily="34" charset="-120"/>
               </a:rPr>
-              <a:t>Word Labs  •  wordlabs.app  •  Prefix: 'pro-' = forward, in favour of</a:t>
+              <a:t>Word Labs  •  wordlabs.app  •  Prefix: 'pro-' = forward, before, in favour of</a:t>
             </a:r>
             <a:endParaRPr lang="en-US" sz="800" dirty="0"/>
           </a:p>
@@ -17663,7 +17663,7 @@
                 <a:ea typeface="Trebuchet MS" pitchFamily="34" charset="-122"/>
                 <a:cs typeface="Trebuchet MS" pitchFamily="34" charset="-120"/>
               </a:rPr>
-              <a:t>protest</a:t>
+              <a:t>promote</a:t>
             </a:r>
             <a:endParaRPr lang="en-US" sz="2800" dirty="0"/>
           </a:p>
@@ -18351,7 +18351,7 @@
                 <a:ea typeface="Calibri" pitchFamily="34" charset="-122"/>
                 <a:cs typeface="Calibri" pitchFamily="34" charset="-120"/>
               </a:rPr>
-              <a:t>Word Labs  •  wordlabs.app  •  Prefix: 'pro-' = forward, in favour of</a:t>
+              <a:t>Word Labs  •  wordlabs.app  •  Prefix: 'pro-' = forward, before, in favour of</a:t>
             </a:r>
             <a:endParaRPr lang="en-US" sz="800" dirty="0"/>
           </a:p>
@@ -18490,7 +18490,7 @@
                 <a:ea typeface="Trebuchet MS" pitchFamily="34" charset="-122"/>
                 <a:cs typeface="Trebuchet MS" pitchFamily="34" charset="-120"/>
               </a:rPr>
-              <a:t>protest</a:t>
+              <a:t>promote</a:t>
             </a:r>
             <a:endParaRPr lang="en-US" sz="2800" dirty="0"/>
           </a:p>
@@ -18668,7 +18668,7 @@
                 <a:ea typeface="Calibri" pitchFamily="34" charset="-122"/>
                 <a:cs typeface="Calibri" pitchFamily="34" charset="-120"/>
               </a:rPr>
-              <a:t>forward, in favour of</a:t>
+              <a:t>forward</a:t>
             </a:r>
             <a:endParaRPr lang="en-US" sz="850" dirty="0"/>
           </a:p>
@@ -18741,7 +18741,7 @@
                 <a:ea typeface="Trebuchet MS" pitchFamily="34" charset="-122"/>
                 <a:cs typeface="Trebuchet MS" pitchFamily="34" charset="-120"/>
               </a:rPr>
-              <a:t>test</a:t>
+              <a:t>mote</a:t>
             </a:r>
             <a:endParaRPr lang="en-US" sz="1300" dirty="0"/>
           </a:p>
@@ -18780,7 +18780,7 @@
                 <a:ea typeface="Calibri" pitchFamily="34" charset="-122"/>
                 <a:cs typeface="Calibri" pitchFamily="34" charset="-120"/>
               </a:rPr>
-              <a:t>to witness or affirm</a:t>
+              <a:t>move</a:t>
             </a:r>
             <a:endParaRPr lang="en-US" sz="850" dirty="0"/>
           </a:p>
@@ -19336,7 +19336,7 @@
                 <a:ea typeface="Calibri" pitchFamily="34" charset="-122"/>
                 <a:cs typeface="Calibri" pitchFamily="34" charset="-120"/>
               </a:rPr>
-              <a:t>Word Labs  •  wordlabs.app  •  Prefix: 'pro-' = forward, in favour of</a:t>
+              <a:t>Word Labs  •  wordlabs.app  •  Prefix: 'pro-' = forward, before, in favour of</a:t>
             </a:r>
             <a:endParaRPr lang="en-US" sz="800" dirty="0"/>
           </a:p>
@@ -19475,7 +19475,7 @@
                 <a:ea typeface="Trebuchet MS" pitchFamily="34" charset="-122"/>
                 <a:cs typeface="Trebuchet MS" pitchFamily="34" charset="-120"/>
               </a:rPr>
-              <a:t>protest</a:t>
+              <a:t>promote</a:t>
             </a:r>
             <a:endParaRPr lang="en-US" sz="2800" dirty="0"/>
           </a:p>
@@ -19653,7 +19653,7 @@
                 <a:ea typeface="Calibri" pitchFamily="34" charset="-122"/>
                 <a:cs typeface="Calibri" pitchFamily="34" charset="-120"/>
               </a:rPr>
-              <a:t>forward, in favour of</a:t>
+              <a:t>forward</a:t>
             </a:r>
             <a:endParaRPr lang="en-US" sz="850" dirty="0"/>
           </a:p>
@@ -19726,7 +19726,7 @@
                 <a:ea typeface="Trebuchet MS" pitchFamily="34" charset="-122"/>
                 <a:cs typeface="Trebuchet MS" pitchFamily="34" charset="-120"/>
               </a:rPr>
-              <a:t>test</a:t>
+              <a:t>mote</a:t>
             </a:r>
             <a:endParaRPr lang="en-US" sz="1300" dirty="0"/>
           </a:p>
@@ -19765,7 +19765,7 @@
                 <a:ea typeface="Calibri" pitchFamily="34" charset="-122"/>
                 <a:cs typeface="Calibri" pitchFamily="34" charset="-120"/>
               </a:rPr>
-              <a:t>to witness or affirm</a:t>
+              <a:t>move</a:t>
             </a:r>
             <a:endParaRPr lang="en-US" sz="850" dirty="0"/>
           </a:p>
@@ -20029,7 +20029,7 @@
                 <a:ea typeface="Trebuchet MS" pitchFamily="34" charset="-122"/>
                 <a:cs typeface="Trebuchet MS" pitchFamily="34" charset="-120"/>
               </a:rPr>
-              <a:t>test</a:t>
+              <a:t>mote</a:t>
             </a:r>
             <a:endParaRPr lang="en-US" sz="1400" dirty="0"/>
           </a:p>
@@ -20453,7 +20453,7 @@
                 <a:ea typeface="Calibri" pitchFamily="34" charset="-122"/>
                 <a:cs typeface="Calibri" pitchFamily="34" charset="-120"/>
               </a:rPr>
-              <a:t>Word Labs  •  wordlabs.app  •  Prefix: 'pro-' = forward, in favour of</a:t>
+              <a:t>Word Labs  •  wordlabs.app  •  Prefix: 'pro-' = forward, before, in favour of</a:t>
             </a:r>
             <a:endParaRPr lang="en-US" sz="800" dirty="0"/>
           </a:p>
@@ -20592,7 +20592,7 @@
                 <a:ea typeface="Trebuchet MS" pitchFamily="34" charset="-122"/>
                 <a:cs typeface="Trebuchet MS" pitchFamily="34" charset="-120"/>
               </a:rPr>
-              <a:t>protest</a:t>
+              <a:t>promote</a:t>
             </a:r>
             <a:endParaRPr lang="en-US" sz="2800" dirty="0"/>
           </a:p>
@@ -20770,7 +20770,7 @@
                 <a:ea typeface="Calibri" pitchFamily="34" charset="-122"/>
                 <a:cs typeface="Calibri" pitchFamily="34" charset="-120"/>
               </a:rPr>
-              <a:t>forward, in favour of</a:t>
+              <a:t>forward</a:t>
             </a:r>
             <a:endParaRPr lang="en-US" sz="850" dirty="0"/>
           </a:p>
@@ -20843,7 +20843,7 @@
                 <a:ea typeface="Trebuchet MS" pitchFamily="34" charset="-122"/>
                 <a:cs typeface="Trebuchet MS" pitchFamily="34" charset="-120"/>
               </a:rPr>
-              <a:t>test</a:t>
+              <a:t>mote</a:t>
             </a:r>
             <a:endParaRPr lang="en-US" sz="1300" dirty="0"/>
           </a:p>
@@ -20882,7 +20882,7 @@
                 <a:ea typeface="Calibri" pitchFamily="34" charset="-122"/>
                 <a:cs typeface="Calibri" pitchFamily="34" charset="-120"/>
               </a:rPr>
-              <a:t>to witness or affirm</a:t>
+              <a:t>move</a:t>
             </a:r>
             <a:endParaRPr lang="en-US" sz="850" dirty="0"/>
           </a:p>
@@ -21146,7 +21146,7 @@
                 <a:ea typeface="Trebuchet MS" pitchFamily="34" charset="-122"/>
                 <a:cs typeface="Trebuchet MS" pitchFamily="34" charset="-120"/>
               </a:rPr>
-              <a:t>test</a:t>
+              <a:t>mote</a:t>
             </a:r>
             <a:endParaRPr lang="en-US" sz="1400" dirty="0"/>
           </a:p>
@@ -21253,7 +21253,7 @@
         </p:nvSpPr>
         <p:spPr>
           <a:xfrm>
-            <a:off x="2254649" y="4169664"/>
+            <a:off x="2427732" y="4169664"/>
             <a:ext cx="685800" cy="475488"/>
           </a:xfrm>
           <a:prstGeom prst="rect">
@@ -21280,7 +21280,7 @@
         </p:nvSpPr>
         <p:spPr>
           <a:xfrm>
-            <a:off x="2254649" y="4169664"/>
+            <a:off x="2427732" y="4169664"/>
             <a:ext cx="685800" cy="475488"/>
           </a:xfrm>
           <a:prstGeom prst="rect">
@@ -21319,7 +21319,7 @@
         </p:nvSpPr>
         <p:spPr>
           <a:xfrm>
-            <a:off x="3293146" y="4169664"/>
+            <a:off x="3639312" y="4169664"/>
             <a:ext cx="685800" cy="475488"/>
           </a:xfrm>
           <a:prstGeom prst="rect">
@@ -21346,7 +21346,7 @@
         </p:nvSpPr>
         <p:spPr>
           <a:xfrm>
-            <a:off x="3293146" y="4169664"/>
+            <a:off x="3639312" y="4169664"/>
             <a:ext cx="685800" cy="475488"/>
           </a:xfrm>
           <a:prstGeom prst="rect">
@@ -21385,7 +21385,7 @@
         </p:nvSpPr>
         <p:spPr>
           <a:xfrm>
-            <a:off x="4331643" y="4169664"/>
+            <a:off x="4850892" y="4169664"/>
             <a:ext cx="685800" cy="475488"/>
           </a:xfrm>
           <a:prstGeom prst="rect">
@@ -21412,7 +21412,7 @@
         </p:nvSpPr>
         <p:spPr>
           <a:xfrm>
-            <a:off x="4331643" y="4169664"/>
+            <a:off x="4850892" y="4169664"/>
             <a:ext cx="685800" cy="475488"/>
           </a:xfrm>
           <a:prstGeom prst="rect">
@@ -21437,7 +21437,7 @@
                 <a:ea typeface="Trebuchet MS" pitchFamily="34" charset="-122"/>
                 <a:cs typeface="Trebuchet MS" pitchFamily="34" charset="-120"/>
               </a:rPr>
-              <a:t>t</a:t>
+              <a:t>m</a:t>
             </a:r>
             <a:endParaRPr lang="en-US" sz="900" dirty="0"/>
           </a:p>
@@ -21451,7 +21451,7 @@
         </p:nvSpPr>
         <p:spPr>
           <a:xfrm>
-            <a:off x="5370141" y="4169664"/>
+            <a:off x="6062472" y="4169664"/>
             <a:ext cx="685800" cy="475488"/>
           </a:xfrm>
           <a:prstGeom prst="rect">
@@ -21478,7 +21478,7 @@
         </p:nvSpPr>
         <p:spPr>
           <a:xfrm>
-            <a:off x="5370141" y="4169664"/>
+            <a:off x="6062472" y="4169664"/>
             <a:ext cx="685800" cy="475488"/>
           </a:xfrm>
           <a:prstGeom prst="rect">
@@ -21503,7 +21503,7 @@
                 <a:ea typeface="Trebuchet MS" pitchFamily="34" charset="-122"/>
                 <a:cs typeface="Trebuchet MS" pitchFamily="34" charset="-120"/>
               </a:rPr>
-              <a:t>e</a:t>
+              <a:t>o</a:t>
             </a:r>
             <a:endParaRPr lang="en-US" sz="900" dirty="0"/>
           </a:p>
@@ -21517,7 +21517,7 @@
         </p:nvSpPr>
         <p:spPr>
           <a:xfrm>
-            <a:off x="6408638" y="4169664"/>
+            <a:off x="7274052" y="4169664"/>
             <a:ext cx="685800" cy="475488"/>
           </a:xfrm>
           <a:prstGeom prst="rect">
@@ -21544,7 +21544,7 @@
         </p:nvSpPr>
         <p:spPr>
           <a:xfrm>
-            <a:off x="6408638" y="4169664"/>
+            <a:off x="7274052" y="4169664"/>
             <a:ext cx="685800" cy="475488"/>
           </a:xfrm>
           <a:prstGeom prst="rect">
@@ -21569,73 +21569,7 @@
                 <a:ea typeface="Trebuchet MS" pitchFamily="34" charset="-122"/>
                 <a:cs typeface="Trebuchet MS" pitchFamily="34" charset="-120"/>
               </a:rPr>
-              <a:t>s</a:t>
-            </a:r>
-            <a:endParaRPr lang="en-US" sz="900" dirty="0"/>
-          </a:p>
-        </p:txBody>
-      </p:sp>
-      <p:sp>
-        <p:nvSpPr>
-          <p:cNvPr id="43" name="Shape 41"/>
-          <p:cNvSpPr/>
-          <p:nvPr/>
-        </p:nvSpPr>
-        <p:spPr>
-          <a:xfrm>
-            <a:off x="7447135" y="4169664"/>
-            <a:ext cx="685800" cy="475488"/>
-          </a:xfrm>
-          <a:prstGeom prst="rect">
-            <a:avLst>
-              <a:gd name="adj" fmla="val 7692"/>
-            </a:avLst>
-          </a:prstGeom>
-          <a:solidFill>
-            <a:srgbClr val="FFFFFF"/>
-          </a:solidFill>
-          <a:ln w="12700">
-            <a:solidFill>
-              <a:srgbClr val="DB2777"/>
-            </a:solidFill>
-            <a:prstDash val="solid"/>
-          </a:ln>
-        </p:spPr>
-      </p:sp>
-      <p:sp>
-        <p:nvSpPr>
-          <p:cNvPr id="44" name="Text 42"/>
-          <p:cNvSpPr/>
-          <p:nvPr/>
-        </p:nvSpPr>
-        <p:spPr>
-          <a:xfrm>
-            <a:off x="7447135" y="4169664"/>
-            <a:ext cx="685800" cy="475488"/>
-          </a:xfrm>
-          <a:prstGeom prst="rect">
-            <a:avLst/>
-          </a:prstGeom>
-          <a:noFill/>
-          <a:ln/>
-        </p:spPr>
-        <p:txBody>
-          <a:bodyPr wrap="square" lIns="0" tIns="0" rIns="0" bIns="0" rtlCol="0" anchor="ctr"/>
-          <a:lstStyle/>
-          <a:p>
-            <a:pPr algn="ctr" indent="0" marL="0">
-              <a:buNone/>
-            </a:pPr>
-            <a:r>
-              <a:rPr lang="en-US" sz="900" b="1" dirty="0">
-                <a:solidFill>
-                  <a:srgbClr val="9D174D"/>
-                </a:solidFill>
-                <a:latin typeface="Trebuchet MS" pitchFamily="34" charset="0"/>
-                <a:ea typeface="Trebuchet MS" pitchFamily="34" charset="-122"/>
-                <a:cs typeface="Trebuchet MS" pitchFamily="34" charset="-120"/>
-              </a:rPr>
-              <a:t>t</a:t>
+              <a:t>te</a:t>
             </a:r>
             <a:endParaRPr lang="en-US" sz="900" dirty="0"/>
           </a:p>
@@ -21927,7 +21861,7 @@
                 <a:ea typeface="Calibri" pitchFamily="34" charset="-122"/>
                 <a:cs typeface="Calibri" pitchFamily="34" charset="-120"/>
               </a:rPr>
-              <a:t>Word Labs  •  wordlabs.app  •  Prefix: 'pro-' = forward, in favour of</a:t>
+              <a:t>Word Labs  •  wordlabs.app  •  Prefix: 'pro-' = forward, before, in favour of</a:t>
             </a:r>
             <a:endParaRPr lang="en-US" sz="800" dirty="0"/>
           </a:p>
@@ -22066,7 +22000,7 @@
                 <a:ea typeface="Trebuchet MS" pitchFamily="34" charset="-122"/>
                 <a:cs typeface="Trebuchet MS" pitchFamily="34" charset="-120"/>
               </a:rPr>
-              <a:t>proclaim</a:t>
+              <a:t>provide</a:t>
             </a:r>
             <a:endParaRPr lang="en-US" sz="2800" dirty="0"/>
           </a:p>
@@ -22754,7 +22688,7 @@
                 <a:ea typeface="Calibri" pitchFamily="34" charset="-122"/>
                 <a:cs typeface="Calibri" pitchFamily="34" charset="-120"/>
               </a:rPr>
-              <a:t>Word Labs  •  wordlabs.app  •  Prefix: 'pro-' = forward, in favour of</a:t>
+              <a:t>Word Labs  •  wordlabs.app  •  Prefix: 'pro-' = forward, before, in favour of</a:t>
             </a:r>
             <a:endParaRPr lang="en-US" sz="800" dirty="0"/>
           </a:p>
@@ -22893,7 +22827,7 @@
                 <a:ea typeface="Trebuchet MS" pitchFamily="34" charset="-122"/>
                 <a:cs typeface="Trebuchet MS" pitchFamily="34" charset="-120"/>
               </a:rPr>
-              <a:t>proclaim</a:t>
+              <a:t>provide</a:t>
             </a:r>
             <a:endParaRPr lang="en-US" sz="2800" dirty="0"/>
           </a:p>
@@ -23071,7 +23005,7 @@
                 <a:ea typeface="Calibri" pitchFamily="34" charset="-122"/>
                 <a:cs typeface="Calibri" pitchFamily="34" charset="-120"/>
               </a:rPr>
-              <a:t>forward, publicly</a:t>
+              <a:t>forward, forth</a:t>
             </a:r>
             <a:endParaRPr lang="en-US" sz="850" dirty="0"/>
           </a:p>
@@ -23144,7 +23078,7 @@
                 <a:ea typeface="Trebuchet MS" pitchFamily="34" charset="-122"/>
                 <a:cs typeface="Trebuchet MS" pitchFamily="34" charset="-120"/>
               </a:rPr>
-              <a:t>claim</a:t>
+              <a:t>vide</a:t>
             </a:r>
             <a:endParaRPr lang="en-US" sz="1300" dirty="0"/>
           </a:p>
@@ -23183,7 +23117,7 @@
                 <a:ea typeface="Calibri" pitchFamily="34" charset="-122"/>
                 <a:cs typeface="Calibri" pitchFamily="34" charset="-120"/>
               </a:rPr>
-              <a:t>to call out or declare</a:t>
+              <a:t>see, supply</a:t>
             </a:r>
             <a:endParaRPr lang="en-US" sz="850" dirty="0"/>
           </a:p>
@@ -23739,7 +23673,7 @@
                 <a:ea typeface="Calibri" pitchFamily="34" charset="-122"/>
                 <a:cs typeface="Calibri" pitchFamily="34" charset="-120"/>
               </a:rPr>
-              <a:t>Word Labs  •  wordlabs.app  •  Prefix: 'pro-' = forward, in favour of</a:t>
+              <a:t>Word Labs  •  wordlabs.app  •  Prefix: 'pro-' = forward, before, in favour of</a:t>
             </a:r>
             <a:endParaRPr lang="en-US" sz="800" dirty="0"/>
           </a:p>
@@ -23812,7 +23746,7 @@
                 <a:ea typeface="Trebuchet MS" pitchFamily="34" charset="-122"/>
                 <a:cs typeface="Trebuchet MS" pitchFamily="34" charset="-120"/>
               </a:rPr>
-              <a:t>We are learning that the prefix 'pro-' means 'forward, in favour of'.</a:t>
+              <a:t>We are learning that the prefix 'pro-' means 'forward, before, in favour of'.</a:t>
             </a:r>
             <a:endParaRPr lang="en-US" sz="2000" dirty="0"/>
           </a:p>
@@ -24458,7 +24392,7 @@
                 <a:ea typeface="Calibri" pitchFamily="34" charset="-122"/>
                 <a:cs typeface="Calibri" pitchFamily="34" charset="-120"/>
               </a:rPr>
-              <a:t>Word Labs  •  wordlabs.app  •  Prefix: 'pro-' = forward, in favour of</a:t>
+              <a:t>Word Labs  •  wordlabs.app  •  Prefix: 'pro-' = forward, before, in favour of</a:t>
             </a:r>
             <a:endParaRPr lang="en-US" sz="800" dirty="0"/>
           </a:p>
@@ -24597,7 +24531,7 @@
                 <a:ea typeface="Trebuchet MS" pitchFamily="34" charset="-122"/>
                 <a:cs typeface="Trebuchet MS" pitchFamily="34" charset="-120"/>
               </a:rPr>
-              <a:t>proclaim</a:t>
+              <a:t>provide</a:t>
             </a:r>
             <a:endParaRPr lang="en-US" sz="2800" dirty="0"/>
           </a:p>
@@ -24775,7 +24709,7 @@
                 <a:ea typeface="Calibri" pitchFamily="34" charset="-122"/>
                 <a:cs typeface="Calibri" pitchFamily="34" charset="-120"/>
               </a:rPr>
-              <a:t>forward, publicly</a:t>
+              <a:t>forward, forth</a:t>
             </a:r>
             <a:endParaRPr lang="en-US" sz="850" dirty="0"/>
           </a:p>
@@ -24848,7 +24782,7 @@
                 <a:ea typeface="Trebuchet MS" pitchFamily="34" charset="-122"/>
                 <a:cs typeface="Trebuchet MS" pitchFamily="34" charset="-120"/>
               </a:rPr>
-              <a:t>claim</a:t>
+              <a:t>vide</a:t>
             </a:r>
             <a:endParaRPr lang="en-US" sz="1300" dirty="0"/>
           </a:p>
@@ -24887,7 +24821,7 @@
                 <a:ea typeface="Calibri" pitchFamily="34" charset="-122"/>
                 <a:cs typeface="Calibri" pitchFamily="34" charset="-120"/>
               </a:rPr>
-              <a:t>to call out or declare</a:t>
+              <a:t>see, supply</a:t>
             </a:r>
             <a:endParaRPr lang="en-US" sz="850" dirty="0"/>
           </a:p>
@@ -25151,7 +25085,7 @@
                 <a:ea typeface="Trebuchet MS" pitchFamily="34" charset="-122"/>
                 <a:cs typeface="Trebuchet MS" pitchFamily="34" charset="-120"/>
               </a:rPr>
-              <a:t>claim</a:t>
+              <a:t>vide</a:t>
             </a:r>
             <a:endParaRPr lang="en-US" sz="1400" dirty="0"/>
           </a:p>
@@ -25575,7 +25509,7 @@
                 <a:ea typeface="Calibri" pitchFamily="34" charset="-122"/>
                 <a:cs typeface="Calibri" pitchFamily="34" charset="-120"/>
               </a:rPr>
-              <a:t>Word Labs  •  wordlabs.app  •  Prefix: 'pro-' = forward, in favour of</a:t>
+              <a:t>Word Labs  •  wordlabs.app  •  Prefix: 'pro-' = forward, before, in favour of</a:t>
             </a:r>
             <a:endParaRPr lang="en-US" sz="800" dirty="0"/>
           </a:p>
@@ -25714,7 +25648,7 @@
                 <a:ea typeface="Trebuchet MS" pitchFamily="34" charset="-122"/>
                 <a:cs typeface="Trebuchet MS" pitchFamily="34" charset="-120"/>
               </a:rPr>
-              <a:t>proclaim</a:t>
+              <a:t>provide</a:t>
             </a:r>
             <a:endParaRPr lang="en-US" sz="2800" dirty="0"/>
           </a:p>
@@ -25892,7 +25826,7 @@
                 <a:ea typeface="Calibri" pitchFamily="34" charset="-122"/>
                 <a:cs typeface="Calibri" pitchFamily="34" charset="-120"/>
               </a:rPr>
-              <a:t>forward, publicly</a:t>
+              <a:t>forward, forth</a:t>
             </a:r>
             <a:endParaRPr lang="en-US" sz="850" dirty="0"/>
           </a:p>
@@ -25965,7 +25899,7 @@
                 <a:ea typeface="Trebuchet MS" pitchFamily="34" charset="-122"/>
                 <a:cs typeface="Trebuchet MS" pitchFamily="34" charset="-120"/>
               </a:rPr>
-              <a:t>claim</a:t>
+              <a:t>vide</a:t>
             </a:r>
             <a:endParaRPr lang="en-US" sz="1300" dirty="0"/>
           </a:p>
@@ -26004,7 +25938,7 @@
                 <a:ea typeface="Calibri" pitchFamily="34" charset="-122"/>
                 <a:cs typeface="Calibri" pitchFamily="34" charset="-120"/>
               </a:rPr>
-              <a:t>to call out or declare</a:t>
+              <a:t>see, supply</a:t>
             </a:r>
             <a:endParaRPr lang="en-US" sz="850" dirty="0"/>
           </a:p>
@@ -26268,7 +26202,7 @@
                 <a:ea typeface="Trebuchet MS" pitchFamily="34" charset="-122"/>
                 <a:cs typeface="Trebuchet MS" pitchFamily="34" charset="-120"/>
               </a:rPr>
-              <a:t>claim</a:t>
+              <a:t>vide</a:t>
             </a:r>
             <a:endParaRPr lang="en-US" sz="1400" dirty="0"/>
           </a:p>
@@ -26559,7 +26493,7 @@
                 <a:ea typeface="Trebuchet MS" pitchFamily="34" charset="-122"/>
                 <a:cs typeface="Trebuchet MS" pitchFamily="34" charset="-120"/>
               </a:rPr>
-              <a:t>cl</a:t>
+              <a:t>v</a:t>
             </a:r>
             <a:endParaRPr lang="en-US" sz="900" dirty="0"/>
           </a:p>
@@ -26625,7 +26559,7 @@
                 <a:ea typeface="Trebuchet MS" pitchFamily="34" charset="-122"/>
                 <a:cs typeface="Trebuchet MS" pitchFamily="34" charset="-120"/>
               </a:rPr>
-              <a:t>ai</a:t>
+              <a:t>i</a:t>
             </a:r>
             <a:endParaRPr lang="en-US" sz="900" dirty="0"/>
           </a:p>
@@ -26691,7 +26625,7 @@
                 <a:ea typeface="Trebuchet MS" pitchFamily="34" charset="-122"/>
                 <a:cs typeface="Trebuchet MS" pitchFamily="34" charset="-120"/>
               </a:rPr>
-              <a:t>m</a:t>
+              <a:t>de</a:t>
             </a:r>
             <a:endParaRPr lang="en-US" sz="900" dirty="0"/>
           </a:p>
@@ -26983,7 +26917,7 @@
                 <a:ea typeface="Calibri" pitchFamily="34" charset="-122"/>
                 <a:cs typeface="Calibri" pitchFamily="34" charset="-120"/>
               </a:rPr>
-              <a:t>Word Labs  •  wordlabs.app  •  Prefix: 'pro-' = forward, in favour of</a:t>
+              <a:t>Word Labs  •  wordlabs.app  •  Prefix: 'pro-' = forward, before, in favour of</a:t>
             </a:r>
             <a:endParaRPr lang="en-US" sz="800" dirty="0"/>
           </a:p>
@@ -27122,7 +27056,7 @@
                 <a:ea typeface="Trebuchet MS" pitchFamily="34" charset="-122"/>
                 <a:cs typeface="Trebuchet MS" pitchFamily="34" charset="-120"/>
               </a:rPr>
-              <a:t>provide</a:t>
+              <a:t>produce</a:t>
             </a:r>
             <a:endParaRPr lang="en-US" sz="2800" dirty="0"/>
           </a:p>
@@ -27810,7 +27744,7 @@
                 <a:ea typeface="Calibri" pitchFamily="34" charset="-122"/>
                 <a:cs typeface="Calibri" pitchFamily="34" charset="-120"/>
               </a:rPr>
-              <a:t>Word Labs  •  wordlabs.app  •  Prefix: 'pro-' = forward, in favour of</a:t>
+              <a:t>Word Labs  •  wordlabs.app  •  Prefix: 'pro-' = forward, before, in favour of</a:t>
             </a:r>
             <a:endParaRPr lang="en-US" sz="800" dirty="0"/>
           </a:p>
@@ -27949,7 +27883,7 @@
                 <a:ea typeface="Trebuchet MS" pitchFamily="34" charset="-122"/>
                 <a:cs typeface="Trebuchet MS" pitchFamily="34" charset="-120"/>
               </a:rPr>
-              <a:t>provide</a:t>
+              <a:t>produce</a:t>
             </a:r>
             <a:endParaRPr lang="en-US" sz="2800" dirty="0"/>
           </a:p>
@@ -28127,7 +28061,7 @@
                 <a:ea typeface="Calibri" pitchFamily="34" charset="-122"/>
                 <a:cs typeface="Calibri" pitchFamily="34" charset="-120"/>
               </a:rPr>
-              <a:t>forward, ahead</a:t>
+              <a:t>forward, forth</a:t>
             </a:r>
             <a:endParaRPr lang="en-US" sz="850" dirty="0"/>
           </a:p>
@@ -28200,7 +28134,7 @@
                 <a:ea typeface="Trebuchet MS" pitchFamily="34" charset="-122"/>
                 <a:cs typeface="Trebuchet MS" pitchFamily="34" charset="-120"/>
               </a:rPr>
-              <a:t>vide</a:t>
+              <a:t>duce</a:t>
             </a:r>
             <a:endParaRPr lang="en-US" sz="1300" dirty="0"/>
           </a:p>
@@ -28239,7 +28173,7 @@
                 <a:ea typeface="Calibri" pitchFamily="34" charset="-122"/>
                 <a:cs typeface="Calibri" pitchFamily="34" charset="-120"/>
               </a:rPr>
-              <a:t>to see or prepare</a:t>
+              <a:t>lead, bring</a:t>
             </a:r>
             <a:endParaRPr lang="en-US" sz="850" dirty="0"/>
           </a:p>
@@ -28795,7 +28729,7 @@
                 <a:ea typeface="Calibri" pitchFamily="34" charset="-122"/>
                 <a:cs typeface="Calibri" pitchFamily="34" charset="-120"/>
               </a:rPr>
-              <a:t>Word Labs  •  wordlabs.app  •  Prefix: 'pro-' = forward, in favour of</a:t>
+              <a:t>Word Labs  •  wordlabs.app  •  Prefix: 'pro-' = forward, before, in favour of</a:t>
             </a:r>
             <a:endParaRPr lang="en-US" sz="800" dirty="0"/>
           </a:p>
@@ -28934,7 +28868,7 @@
                 <a:ea typeface="Trebuchet MS" pitchFamily="34" charset="-122"/>
                 <a:cs typeface="Trebuchet MS" pitchFamily="34" charset="-120"/>
               </a:rPr>
-              <a:t>provide</a:t>
+              <a:t>produce</a:t>
             </a:r>
             <a:endParaRPr lang="en-US" sz="2800" dirty="0"/>
           </a:p>
@@ -29112,7 +29046,7 @@
                 <a:ea typeface="Calibri" pitchFamily="34" charset="-122"/>
                 <a:cs typeface="Calibri" pitchFamily="34" charset="-120"/>
               </a:rPr>
-              <a:t>forward, ahead</a:t>
+              <a:t>forward, forth</a:t>
             </a:r>
             <a:endParaRPr lang="en-US" sz="850" dirty="0"/>
           </a:p>
@@ -29185,7 +29119,7 @@
                 <a:ea typeface="Trebuchet MS" pitchFamily="34" charset="-122"/>
                 <a:cs typeface="Trebuchet MS" pitchFamily="34" charset="-120"/>
               </a:rPr>
-              <a:t>vide</a:t>
+              <a:t>duce</a:t>
             </a:r>
             <a:endParaRPr lang="en-US" sz="1300" dirty="0"/>
           </a:p>
@@ -29224,7 +29158,7 @@
                 <a:ea typeface="Calibri" pitchFamily="34" charset="-122"/>
                 <a:cs typeface="Calibri" pitchFamily="34" charset="-120"/>
               </a:rPr>
-              <a:t>to see or prepare</a:t>
+              <a:t>lead, bring</a:t>
             </a:r>
             <a:endParaRPr lang="en-US" sz="850" dirty="0"/>
           </a:p>
@@ -29488,7 +29422,7 @@
                 <a:ea typeface="Trebuchet MS" pitchFamily="34" charset="-122"/>
                 <a:cs typeface="Trebuchet MS" pitchFamily="34" charset="-120"/>
               </a:rPr>
-              <a:t>vide</a:t>
+              <a:t>duce</a:t>
             </a:r>
             <a:endParaRPr lang="en-US" sz="1400" dirty="0"/>
           </a:p>
@@ -29912,7 +29846,7 @@
                 <a:ea typeface="Calibri" pitchFamily="34" charset="-122"/>
                 <a:cs typeface="Calibri" pitchFamily="34" charset="-120"/>
               </a:rPr>
-              <a:t>Word Labs  •  wordlabs.app  •  Prefix: 'pro-' = forward, in favour of</a:t>
+              <a:t>Word Labs  •  wordlabs.app  •  Prefix: 'pro-' = forward, before, in favour of</a:t>
             </a:r>
             <a:endParaRPr lang="en-US" sz="800" dirty="0"/>
           </a:p>
@@ -30051,7 +29985,7 @@
                 <a:ea typeface="Trebuchet MS" pitchFamily="34" charset="-122"/>
                 <a:cs typeface="Trebuchet MS" pitchFamily="34" charset="-120"/>
               </a:rPr>
-              <a:t>provide</a:t>
+              <a:t>produce</a:t>
             </a:r>
             <a:endParaRPr lang="en-US" sz="2800" dirty="0"/>
           </a:p>
@@ -30229,7 +30163,7 @@
                 <a:ea typeface="Calibri" pitchFamily="34" charset="-122"/>
                 <a:cs typeface="Calibri" pitchFamily="34" charset="-120"/>
               </a:rPr>
-              <a:t>forward, ahead</a:t>
+              <a:t>forward, forth</a:t>
             </a:r>
             <a:endParaRPr lang="en-US" sz="850" dirty="0"/>
           </a:p>
@@ -30302,7 +30236,7 @@
                 <a:ea typeface="Trebuchet MS" pitchFamily="34" charset="-122"/>
                 <a:cs typeface="Trebuchet MS" pitchFamily="34" charset="-120"/>
               </a:rPr>
-              <a:t>vide</a:t>
+              <a:t>duce</a:t>
             </a:r>
             <a:endParaRPr lang="en-US" sz="1300" dirty="0"/>
           </a:p>
@@ -30341,7 +30275,7 @@
                 <a:ea typeface="Calibri" pitchFamily="34" charset="-122"/>
                 <a:cs typeface="Calibri" pitchFamily="34" charset="-120"/>
               </a:rPr>
-              <a:t>to see or prepare</a:t>
+              <a:t>lead, bring</a:t>
             </a:r>
             <a:endParaRPr lang="en-US" sz="850" dirty="0"/>
           </a:p>
@@ -30605,7 +30539,7 @@
                 <a:ea typeface="Trebuchet MS" pitchFamily="34" charset="-122"/>
                 <a:cs typeface="Trebuchet MS" pitchFamily="34" charset="-120"/>
               </a:rPr>
-              <a:t>vide</a:t>
+              <a:t>duce</a:t>
             </a:r>
             <a:endParaRPr lang="en-US" sz="1400" dirty="0"/>
           </a:p>
@@ -30686,11 +30620,11 @@
         <p:spPr>
           <a:xfrm>
             <a:off x="1874520" y="4096512"/>
-            <a:ext cx="6903720" cy="658368"/>
+            <a:ext cx="6903720" cy="804672"/>
           </a:xfrm>
           <a:prstGeom prst="rect">
             <a:avLst>
-              <a:gd name="adj" fmla="val 8333"/>
+              <a:gd name="adj" fmla="val 6818"/>
             </a:avLst>
           </a:prstGeom>
           <a:solidFill>
@@ -30713,11 +30647,11 @@
         <p:spPr>
           <a:xfrm>
             <a:off x="2427732" y="4169664"/>
-            <a:ext cx="685800" cy="475488"/>
+            <a:ext cx="685800" cy="384048"/>
           </a:xfrm>
           <a:prstGeom prst="rect">
             <a:avLst>
-              <a:gd name="adj" fmla="val 7692"/>
+              <a:gd name="adj" fmla="val 9524"/>
             </a:avLst>
           </a:prstGeom>
           <a:solidFill>
@@ -30740,7 +30674,7 @@
         <p:spPr>
           <a:xfrm>
             <a:off x="2427732" y="4169664"/>
-            <a:ext cx="685800" cy="475488"/>
+            <a:ext cx="685800" cy="384048"/>
           </a:xfrm>
           <a:prstGeom prst="rect">
             <a:avLst/>
@@ -30779,11 +30713,11 @@
         <p:spPr>
           <a:xfrm>
             <a:off x="3639312" y="4169664"/>
-            <a:ext cx="685800" cy="475488"/>
+            <a:ext cx="685800" cy="384048"/>
           </a:xfrm>
           <a:prstGeom prst="rect">
             <a:avLst>
-              <a:gd name="adj" fmla="val 7692"/>
+              <a:gd name="adj" fmla="val 9524"/>
             </a:avLst>
           </a:prstGeom>
           <a:solidFill>
@@ -30806,7 +30740,7 @@
         <p:spPr>
           <a:xfrm>
             <a:off x="3639312" y="4169664"/>
-            <a:ext cx="685800" cy="475488"/>
+            <a:ext cx="685800" cy="384048"/>
           </a:xfrm>
           <a:prstGeom prst="rect">
             <a:avLst/>
@@ -30845,11 +30779,11 @@
         <p:spPr>
           <a:xfrm>
             <a:off x="4850892" y="4169664"/>
-            <a:ext cx="685800" cy="475488"/>
+            <a:ext cx="685800" cy="384048"/>
           </a:xfrm>
           <a:prstGeom prst="rect">
             <a:avLst>
-              <a:gd name="adj" fmla="val 7692"/>
+              <a:gd name="adj" fmla="val 9524"/>
             </a:avLst>
           </a:prstGeom>
           <a:solidFill>
@@ -30872,7 +30806,7 @@
         <p:spPr>
           <a:xfrm>
             <a:off x="4850892" y="4169664"/>
-            <a:ext cx="685800" cy="475488"/>
+            <a:ext cx="685800" cy="384048"/>
           </a:xfrm>
           <a:prstGeom prst="rect">
             <a:avLst/>
@@ -30896,7 +30830,7 @@
                 <a:ea typeface="Trebuchet MS" pitchFamily="34" charset="-122"/>
                 <a:cs typeface="Trebuchet MS" pitchFamily="34" charset="-120"/>
               </a:rPr>
-              <a:t>v</a:t>
+              <a:t>d</a:t>
             </a:r>
             <a:endParaRPr lang="en-US" sz="900" dirty="0"/>
           </a:p>
@@ -30911,11 +30845,11 @@
         <p:spPr>
           <a:xfrm>
             <a:off x="6062472" y="4169664"/>
-            <a:ext cx="685800" cy="475488"/>
+            <a:ext cx="685800" cy="384048"/>
           </a:xfrm>
           <a:prstGeom prst="rect">
             <a:avLst>
-              <a:gd name="adj" fmla="val 7692"/>
+              <a:gd name="adj" fmla="val 9524"/>
             </a:avLst>
           </a:prstGeom>
           <a:solidFill>
@@ -30938,7 +30872,7 @@
         <p:spPr>
           <a:xfrm>
             <a:off x="6062472" y="4169664"/>
-            <a:ext cx="685800" cy="475488"/>
+            <a:ext cx="685800" cy="384048"/>
           </a:xfrm>
           <a:prstGeom prst="rect">
             <a:avLst/>
@@ -30962,7 +30896,7 @@
                 <a:ea typeface="Trebuchet MS" pitchFamily="34" charset="-122"/>
                 <a:cs typeface="Trebuchet MS" pitchFamily="34" charset="-120"/>
               </a:rPr>
-              <a:t>i</a:t>
+              <a:t>u</a:t>
             </a:r>
             <a:endParaRPr lang="en-US" sz="900" dirty="0"/>
           </a:p>
@@ -30977,11 +30911,11 @@
         <p:spPr>
           <a:xfrm>
             <a:off x="7274052" y="4169664"/>
-            <a:ext cx="685800" cy="475488"/>
+            <a:ext cx="685800" cy="384048"/>
           </a:xfrm>
           <a:prstGeom prst="rect">
             <a:avLst>
-              <a:gd name="adj" fmla="val 7692"/>
+              <a:gd name="adj" fmla="val 9524"/>
             </a:avLst>
           </a:prstGeom>
           <a:solidFill>
@@ -31004,7 +30938,7 @@
         <p:spPr>
           <a:xfrm>
             <a:off x="7274052" y="4169664"/>
-            <a:ext cx="685800" cy="475488"/>
+            <a:ext cx="685800" cy="384048"/>
           </a:xfrm>
           <a:prstGeom prst="rect">
             <a:avLst/>
@@ -31028,9 +30962,48 @@
                 <a:ea typeface="Trebuchet MS" pitchFamily="34" charset="-122"/>
                 <a:cs typeface="Trebuchet MS" pitchFamily="34" charset="-120"/>
               </a:rPr>
-              <a:t>de</a:t>
+              <a:t>ce</a:t>
             </a:r>
             <a:endParaRPr lang="en-US" sz="900" dirty="0"/>
+          </a:p>
+        </p:txBody>
+      </p:sp>
+      <p:sp>
+        <p:nvSpPr>
+          <p:cNvPr id="43" name="Text 41"/>
+          <p:cNvSpPr/>
+          <p:nvPr/>
+        </p:nvSpPr>
+        <p:spPr>
+          <a:xfrm>
+            <a:off x="7274052" y="4572000"/>
+            <a:ext cx="685800" cy="219456"/>
+          </a:xfrm>
+          <a:prstGeom prst="rect">
+            <a:avLst/>
+          </a:prstGeom>
+          <a:noFill/>
+          <a:ln/>
+        </p:spPr>
+        <p:txBody>
+          <a:bodyPr wrap="square" lIns="0" tIns="0" rIns="0" bIns="0" rtlCol="0" anchor="t"/>
+          <a:lstStyle/>
+          <a:p>
+            <a:pPr algn="ctr" indent="0" marL="0">
+              <a:buNone/>
+            </a:pPr>
+            <a:r>
+              <a:rPr lang="en-US" sz="750" i="1" dirty="0">
+                <a:solidFill>
+                  <a:srgbClr val="94A3B8"/>
+                </a:solidFill>
+                <a:latin typeface="Calibri" pitchFamily="34" charset="0"/>
+                <a:ea typeface="Calibri" pitchFamily="34" charset="-122"/>
+                <a:cs typeface="Calibri" pitchFamily="34" charset="-120"/>
+              </a:rPr>
+              <a:t>/s/</a:t>
+            </a:r>
+            <a:endParaRPr lang="en-US" sz="750" dirty="0"/>
           </a:p>
         </p:txBody>
       </p:sp>
@@ -31320,7 +31293,7 @@
                 <a:ea typeface="Calibri" pitchFamily="34" charset="-122"/>
                 <a:cs typeface="Calibri" pitchFamily="34" charset="-120"/>
               </a:rPr>
-              <a:t>Word Labs  •  wordlabs.app  •  Prefix: 'pro-' = forward, in favour of</a:t>
+              <a:t>Word Labs  •  wordlabs.app  •  Prefix: 'pro-' = forward, before, in favour of</a:t>
             </a:r>
             <a:endParaRPr lang="en-US" sz="800" dirty="0"/>
           </a:p>
@@ -32489,7 +32462,7 @@
                 <a:ea typeface="Calibri" pitchFamily="34" charset="-122"/>
                 <a:cs typeface="Calibri" pitchFamily="34" charset="-120"/>
               </a:rPr>
-              <a:t>Word Labs  •  wordlabs.app  •  Prefix: 'pro-' = forward, in favour of</a:t>
+              <a:t>Word Labs  •  wordlabs.app  •  Prefix: 'pro-' = forward, before, in favour of</a:t>
             </a:r>
             <a:endParaRPr lang="en-US" sz="800" dirty="0"/>
           </a:p>
@@ -33071,7 +33044,7 @@
                 <a:ea typeface="Trebuchet MS" pitchFamily="34" charset="-122"/>
                 <a:cs typeface="Trebuchet MS" pitchFamily="34" charset="-120"/>
               </a:rPr>
-              <a:t>-ing</a:t>
+              <a:t>-ed</a:t>
             </a:r>
             <a:endParaRPr lang="en-US" sz="1300" dirty="0"/>
           </a:p>
@@ -33160,7 +33133,7 @@
                 <a:ea typeface="Trebuchet MS" pitchFamily="34" charset="-122"/>
                 <a:cs typeface="Trebuchet MS" pitchFamily="34" charset="-120"/>
               </a:rPr>
-              <a:t>duce</a:t>
+              <a:t>mote</a:t>
             </a:r>
             <a:endParaRPr lang="en-US" sz="1300" dirty="0"/>
           </a:p>
@@ -33224,7 +33197,7 @@
                 <a:ea typeface="Trebuchet MS" pitchFamily="34" charset="-122"/>
                 <a:cs typeface="Trebuchet MS" pitchFamily="34" charset="-120"/>
               </a:rPr>
-              <a:t>-ed</a:t>
+              <a:t>-ing</a:t>
             </a:r>
             <a:endParaRPr lang="en-US" sz="1300" dirty="0"/>
           </a:p>
@@ -33466,7 +33439,7 @@
                 <a:ea typeface="Trebuchet MS" pitchFamily="34" charset="-122"/>
                 <a:cs typeface="Trebuchet MS" pitchFamily="34" charset="-120"/>
               </a:rPr>
-              <a:t>claim</a:t>
+              <a:t>vide</a:t>
             </a:r>
             <a:endParaRPr lang="en-US" sz="1300" dirty="0"/>
           </a:p>
@@ -33767,7 +33740,7 @@
                 <a:ea typeface="Trebuchet MS" pitchFamily="34" charset="-122"/>
                 <a:cs typeface="Trebuchet MS" pitchFamily="34" charset="-120"/>
               </a:rPr>
-              <a:t>produce</a:t>
+              <a:t>provide</a:t>
             </a:r>
             <a:endParaRPr lang="en-US" sz="1200" dirty="0"/>
           </a:p>
@@ -33833,7 +33806,7 @@
                 <a:ea typeface="Trebuchet MS" pitchFamily="34" charset="-122"/>
                 <a:cs typeface="Trebuchet MS" pitchFamily="34" charset="-120"/>
               </a:rPr>
-              <a:t>project</a:t>
+              <a:t>promote</a:t>
             </a:r>
             <a:endParaRPr lang="en-US" sz="1200" dirty="0"/>
           </a:p>
@@ -33899,7 +33872,7 @@
                 <a:ea typeface="Trebuchet MS" pitchFamily="34" charset="-122"/>
                 <a:cs typeface="Trebuchet MS" pitchFamily="34" charset="-120"/>
               </a:rPr>
-              <a:t>proclaim</a:t>
+              <a:t>project</a:t>
             </a:r>
             <a:endParaRPr lang="en-US" sz="1200" dirty="0"/>
           </a:p>
@@ -33965,7 +33938,7 @@
                 <a:ea typeface="Trebuchet MS" pitchFamily="34" charset="-122"/>
                 <a:cs typeface="Trebuchet MS" pitchFamily="34" charset="-120"/>
               </a:rPr>
-              <a:t>promote</a:t>
+              <a:t>produce</a:t>
             </a:r>
             <a:endParaRPr lang="en-US" sz="1200" dirty="0"/>
           </a:p>
@@ -34031,7 +34004,7 @@
                 <a:ea typeface="Trebuchet MS" pitchFamily="34" charset="-122"/>
                 <a:cs typeface="Trebuchet MS" pitchFamily="34" charset="-120"/>
               </a:rPr>
-              <a:t>provide</a:t>
+              <a:t>promise</a:t>
             </a:r>
             <a:endParaRPr lang="en-US" sz="1200" dirty="0"/>
           </a:p>
@@ -34097,7 +34070,7 @@
                 <a:ea typeface="Trebuchet MS" pitchFamily="34" charset="-122"/>
                 <a:cs typeface="Trebuchet MS" pitchFamily="34" charset="-120"/>
               </a:rPr>
-              <a:t>protest</a:t>
+              <a:t>profound</a:t>
             </a:r>
             <a:endParaRPr lang="en-US" sz="1200" dirty="0"/>
           </a:p>
@@ -34389,7 +34362,7 @@
                 <a:ea typeface="Calibri" pitchFamily="34" charset="-122"/>
                 <a:cs typeface="Calibri" pitchFamily="34" charset="-120"/>
               </a:rPr>
-              <a:t>Word Labs  •  wordlabs.app  •  Prefix: 'pro-' = forward, in favour of</a:t>
+              <a:t>Word Labs  •  wordlabs.app  •  Prefix: 'pro-' = forward, before, in favour of</a:t>
             </a:r>
             <a:endParaRPr lang="en-US" sz="800" dirty="0"/>
           </a:p>
@@ -34553,7 +34526,7 @@
                 <a:ea typeface="Calibri" pitchFamily="34" charset="-122"/>
                 <a:cs typeface="Calibri" pitchFamily="34" charset="-120"/>
               </a:rPr>
-              <a:t>A meaningful word part added to the beginning of a root to change its meaning. The prefix 'pro-' means 'forward, in favour of'.</a:t>
+              <a:t>A meaningful word part added to the beginning of a root to change its meaning. The prefix 'pro-' means 'forward, before, in favour of'.</a:t>
             </a:r>
             <a:endParaRPr lang="en-US" sz="1350" dirty="0"/>
           </a:p>
@@ -35173,7 +35146,7 @@
                 <a:ea typeface="Calibri" pitchFamily="34" charset="-122"/>
                 <a:cs typeface="Calibri" pitchFamily="34" charset="-120"/>
               </a:rPr>
-              <a:t>Word Labs  •  wordlabs.app  •  Prefix: 'pro-' = forward, in favour of</a:t>
+              <a:t>Word Labs  •  wordlabs.app  •  Prefix: 'pro-' = forward, before, in favour of</a:t>
             </a:r>
             <a:endParaRPr lang="en-US" sz="800" dirty="0"/>
           </a:p>
@@ -35285,7 +35258,7 @@
                 <a:ea typeface="Calibri" pitchFamily="34" charset="-122"/>
                 <a:cs typeface="Calibri" pitchFamily="34" charset="-120"/>
               </a:rPr>
-              <a:t>1.  The prefix 'pro-' can mean 'forward' as in 'progress'.</a:t>
+              <a:t>1.  The word 'protect' uses the prefix 'pro-' meaning forward or in front.</a:t>
             </a:r>
             <a:endParaRPr lang="en-US" sz="1300" dirty="0"/>
           </a:p>
@@ -35424,7 +35397,7 @@
                 <a:ea typeface="Calibri" pitchFamily="34" charset="-122"/>
                 <a:cs typeface="Calibri" pitchFamily="34" charset="-120"/>
               </a:rPr>
-              <a:t>2.  The prefix 'pro-' means 'against' something.</a:t>
+              <a:t>2.  The prefix 'pro-' can mean 'forward' or 'in favour of'.</a:t>
             </a:r>
             <a:endParaRPr lang="en-US" sz="1300" dirty="0"/>
           </a:p>
@@ -35447,11 +35420,11 @@
             </a:avLst>
           </a:prstGeom>
           <a:solidFill>
-            <a:srgbClr val="FEE2E2"/>
-          </a:solidFill>
-          <a:ln w="12700">
-            <a:solidFill>
-              <a:srgbClr val="DC2626"/>
+            <a:srgbClr val="DCFCE7"/>
+          </a:solidFill>
+          <a:ln w="12700">
+            <a:solidFill>
+              <a:srgbClr val="16A34A"/>
             </a:solidFill>
             <a:prstDash val="solid"/>
           </a:ln>
@@ -35484,13 +35457,13 @@
             <a:r>
               <a:rPr lang="en-US" sz="1100" b="1" dirty="0">
                 <a:solidFill>
-                  <a:srgbClr val="DC2626"/>
+                  <a:srgbClr val="16A34A"/>
                 </a:solidFill>
                 <a:latin typeface="Trebuchet MS" pitchFamily="34" charset="0"/>
                 <a:ea typeface="Trebuchet MS" pitchFamily="34" charset="-122"/>
                 <a:cs typeface="Trebuchet MS" pitchFamily="34" charset="-120"/>
               </a:rPr>
-              <a:t>FALSE</a:t>
+              <a:t>TRUE</a:t>
             </a:r>
             <a:endParaRPr lang="en-US" sz="1100" dirty="0"/>
           </a:p>
@@ -35563,7 +35536,7 @@
                 <a:ea typeface="Calibri" pitchFamily="34" charset="-122"/>
                 <a:cs typeface="Calibri" pitchFamily="34" charset="-120"/>
               </a:rPr>
-              <a:t>3.  The word 'protect' uses the prefix 'pro-' meaning forward or in favour of.</a:t>
+              <a:t>3.  The prefix 'pro-' always makes a word mean 'against something'.</a:t>
             </a:r>
             <a:endParaRPr lang="en-US" sz="1300" dirty="0"/>
           </a:p>
@@ -35586,11 +35559,11 @@
             </a:avLst>
           </a:prstGeom>
           <a:solidFill>
-            <a:srgbClr val="DCFCE7"/>
-          </a:solidFill>
-          <a:ln w="12700">
-            <a:solidFill>
-              <a:srgbClr val="16A34A"/>
+            <a:srgbClr val="FEE2E2"/>
+          </a:solidFill>
+          <a:ln w="12700">
+            <a:solidFill>
+              <a:srgbClr val="DC2626"/>
             </a:solidFill>
             <a:prstDash val="solid"/>
           </a:ln>
@@ -35623,13 +35596,13 @@
             <a:r>
               <a:rPr lang="en-US" sz="1100" b="1" dirty="0">
                 <a:solidFill>
-                  <a:srgbClr val="16A34A"/>
+                  <a:srgbClr val="DC2626"/>
                 </a:solidFill>
                 <a:latin typeface="Trebuchet MS" pitchFamily="34" charset="0"/>
                 <a:ea typeface="Trebuchet MS" pitchFamily="34" charset="-122"/>
                 <a:cs typeface="Trebuchet MS" pitchFamily="34" charset="-120"/>
               </a:rPr>
-              <a:t>TRUE</a:t>
+              <a:t>FALSE</a:t>
             </a:r>
             <a:endParaRPr lang="en-US" sz="1100" dirty="0"/>
           </a:p>
@@ -35702,7 +35675,7 @@
                 <a:ea typeface="Calibri" pitchFamily="34" charset="-122"/>
                 <a:cs typeface="Calibri" pitchFamily="34" charset="-120"/>
               </a:rPr>
-              <a:t>4.  Words with 'pro-' often involve moving forward or supporting something.</a:t>
+              <a:t>4.  The prefix 'pro-' comes from Latin.</a:t>
             </a:r>
             <a:endParaRPr lang="en-US" sz="1300" dirty="0"/>
           </a:p>
@@ -35841,7 +35814,7 @@
                 <a:ea typeface="Calibri" pitchFamily="34" charset="-122"/>
                 <a:cs typeface="Calibri" pitchFamily="34" charset="-120"/>
               </a:rPr>
-              <a:t>5.  The prefix 'pro-' comes from Old English.</a:t>
+              <a:t>5.  The word 'problem' is a good example of the prefix 'pro-' meaning forward.</a:t>
             </a:r>
             <a:endParaRPr lang="en-US" sz="1300" dirty="0"/>
           </a:p>
@@ -36199,7 +36172,7 @@
                 <a:ea typeface="Calibri" pitchFamily="34" charset="-122"/>
                 <a:cs typeface="Calibri" pitchFamily="34" charset="-120"/>
               </a:rPr>
-              <a:t>Word Labs  •  wordlabs.app  •  Prefix: 'pro-' = forward, in favour of</a:t>
+              <a:t>Word Labs  •  wordlabs.app  •  Prefix: 'pro-' = forward, before, in favour of</a:t>
             </a:r>
             <a:endParaRPr lang="en-US" sz="800" dirty="0"/>
           </a:p>
@@ -36336,7 +36309,7 @@
                 <a:ea typeface="Trebuchet MS" pitchFamily="34" charset="-122"/>
                 <a:cs typeface="Trebuchet MS" pitchFamily="34" charset="-120"/>
               </a:rPr>
-              <a:t>forward, in favour of</a:t>
+              <a:t>forward, before, in favour of</a:t>
             </a:r>
             <a:endParaRPr lang="en-US" sz="2000" dirty="0"/>
           </a:p>
@@ -36612,7 +36585,7 @@
                 <a:ea typeface="Trebuchet MS" pitchFamily="34" charset="-122"/>
                 <a:cs typeface="Trebuchet MS" pitchFamily="34" charset="-120"/>
               </a:rPr>
-              <a:t>produce</a:t>
+              <a:t>provide</a:t>
             </a:r>
             <a:endParaRPr lang="en-US" sz="1300" dirty="0"/>
           </a:p>
@@ -36678,7 +36651,7 @@
                 <a:ea typeface="Trebuchet MS" pitchFamily="34" charset="-122"/>
                 <a:cs typeface="Trebuchet MS" pitchFamily="34" charset="-120"/>
               </a:rPr>
-              <a:t>project</a:t>
+              <a:t>promote</a:t>
             </a:r>
             <a:endParaRPr lang="en-US" sz="1300" dirty="0"/>
           </a:p>
@@ -36744,7 +36717,7 @@
                 <a:ea typeface="Trebuchet MS" pitchFamily="34" charset="-122"/>
                 <a:cs typeface="Trebuchet MS" pitchFamily="34" charset="-120"/>
               </a:rPr>
-              <a:t>proclaim</a:t>
+              <a:t>project</a:t>
             </a:r>
             <a:endParaRPr lang="en-US" sz="1300" dirty="0"/>
           </a:p>
@@ -36810,7 +36783,7 @@
                 <a:ea typeface="Trebuchet MS" pitchFamily="34" charset="-122"/>
                 <a:cs typeface="Trebuchet MS" pitchFamily="34" charset="-120"/>
               </a:rPr>
-              <a:t>promote</a:t>
+              <a:t>produce</a:t>
             </a:r>
             <a:endParaRPr lang="en-US" sz="1300" dirty="0"/>
           </a:p>
@@ -36876,7 +36849,7 @@
                 <a:ea typeface="Trebuchet MS" pitchFamily="34" charset="-122"/>
                 <a:cs typeface="Trebuchet MS" pitchFamily="34" charset="-120"/>
               </a:rPr>
-              <a:t>provide</a:t>
+              <a:t>promise</a:t>
             </a:r>
             <a:endParaRPr lang="en-US" sz="1300" dirty="0"/>
           </a:p>
@@ -37168,7 +37141,7 @@
                 <a:ea typeface="Calibri" pitchFamily="34" charset="-122"/>
                 <a:cs typeface="Calibri" pitchFamily="34" charset="-120"/>
               </a:rPr>
-              <a:t>Word Labs  •  wordlabs.app  •  Prefix: 'pro-' = forward, in favour of</a:t>
+              <a:t>Word Labs  •  wordlabs.app  •  Prefix: 'pro-' = forward, before, in favour of</a:t>
             </a:r>
             <a:endParaRPr lang="en-US" sz="800" dirty="0"/>
           </a:p>
@@ -37750,7 +37723,7 @@
                 <a:ea typeface="Trebuchet MS" pitchFamily="34" charset="-122"/>
                 <a:cs typeface="Trebuchet MS" pitchFamily="34" charset="-120"/>
               </a:rPr>
-              <a:t>-ing</a:t>
+              <a:t>-ed</a:t>
             </a:r>
             <a:endParaRPr lang="en-US" sz="1300" dirty="0"/>
           </a:p>
@@ -37839,7 +37812,7 @@
                 <a:ea typeface="Trebuchet MS" pitchFamily="34" charset="-122"/>
                 <a:cs typeface="Trebuchet MS" pitchFamily="34" charset="-120"/>
               </a:rPr>
-              <a:t>duce</a:t>
+              <a:t>mote</a:t>
             </a:r>
             <a:endParaRPr lang="en-US" sz="1300" dirty="0"/>
           </a:p>
@@ -37903,7 +37876,7 @@
                 <a:ea typeface="Trebuchet MS" pitchFamily="34" charset="-122"/>
                 <a:cs typeface="Trebuchet MS" pitchFamily="34" charset="-120"/>
               </a:rPr>
-              <a:t>-ed</a:t>
+              <a:t>-ing</a:t>
             </a:r>
             <a:endParaRPr lang="en-US" sz="1300" dirty="0"/>
           </a:p>
@@ -38145,7 +38118,7 @@
                 <a:ea typeface="Trebuchet MS" pitchFamily="34" charset="-122"/>
                 <a:cs typeface="Trebuchet MS" pitchFamily="34" charset="-120"/>
               </a:rPr>
-              <a:t>claim</a:t>
+              <a:t>vide</a:t>
             </a:r>
             <a:endParaRPr lang="en-US" sz="1300" dirty="0"/>
           </a:p>
@@ -38942,7 +38915,7 @@
                 <a:ea typeface="Calibri" pitchFamily="34" charset="-122"/>
                 <a:cs typeface="Calibri" pitchFamily="34" charset="-120"/>
               </a:rPr>
-              <a:t>Word Labs  •  wordlabs.app  •  Prefix: 'pro-' = forward, in favour of</a:t>
+              <a:t>Word Labs  •  wordlabs.app  •  Prefix: 'pro-' = forward, before, in favour of</a:t>
             </a:r>
             <a:endParaRPr lang="en-US" sz="800" dirty="0"/>
           </a:p>
@@ -39120,7 +39093,7 @@
                 <a:ea typeface="Calibri" pitchFamily="34" charset="-122"/>
                 <a:cs typeface="Calibri" pitchFamily="34" charset="-120"/>
               </a:rPr>
-              <a:t>To make or create something.</a:t>
+              <a:t>To give someone what they need.</a:t>
             </a:r>
             <a:endParaRPr lang="en-US" sz="1200" dirty="0"/>
           </a:p>
@@ -39259,7 +39232,7 @@
                 <a:ea typeface="Calibri" pitchFamily="34" charset="-122"/>
                 <a:cs typeface="Calibri" pitchFamily="34" charset="-120"/>
               </a:rPr>
-              <a:t>To announce something loudly and officially.</a:t>
+              <a:t>A planned piece of work, or to throw something forward.</a:t>
             </a:r>
             <a:endParaRPr lang="en-US" sz="1200" dirty="0"/>
           </a:p>
@@ -39332,7 +39305,7 @@
                 <a:ea typeface="Trebuchet MS" pitchFamily="34" charset="-122"/>
                 <a:cs typeface="Trebuchet MS" pitchFamily="34" charset="-120"/>
               </a:rPr>
-              <a:t>produce</a:t>
+              <a:t>provide</a:t>
             </a:r>
             <a:endParaRPr lang="en-US" sz="1200" dirty="0"/>
           </a:p>
@@ -39398,7 +39371,7 @@
                 <a:ea typeface="Calibri" pitchFamily="34" charset="-122"/>
                 <a:cs typeface="Calibri" pitchFamily="34" charset="-120"/>
               </a:rPr>
-              <a:t>To move forward or improve over time.</a:t>
+              <a:t>Moving forward or improving over time.</a:t>
             </a:r>
             <a:endParaRPr lang="en-US" sz="1200" dirty="0"/>
           </a:p>
@@ -39471,7 +39444,7 @@
                 <a:ea typeface="Trebuchet MS" pitchFamily="34" charset="-122"/>
                 <a:cs typeface="Trebuchet MS" pitchFamily="34" charset="-120"/>
               </a:rPr>
-              <a:t>project</a:t>
+              <a:t>promote</a:t>
             </a:r>
             <a:endParaRPr lang="en-US" sz="1200" dirty="0"/>
           </a:p>
@@ -39537,7 +39510,7 @@
                 <a:ea typeface="Calibri" pitchFamily="34" charset="-122"/>
                 <a:cs typeface="Calibri" pitchFamily="34" charset="-120"/>
               </a:rPr>
-              <a:t>To move someone up to a higher position, or to support an idea.</a:t>
+              <a:t>To make or create something.</a:t>
             </a:r>
             <a:endParaRPr lang="en-US" sz="1200" dirty="0"/>
           </a:p>
@@ -39610,7 +39583,7 @@
                 <a:ea typeface="Trebuchet MS" pitchFamily="34" charset="-122"/>
                 <a:cs typeface="Trebuchet MS" pitchFamily="34" charset="-120"/>
               </a:rPr>
-              <a:t>proclaim</a:t>
+              <a:t>project</a:t>
             </a:r>
             <a:endParaRPr lang="en-US" sz="1200" dirty="0"/>
           </a:p>
@@ -39676,7 +39649,7 @@
                 <a:ea typeface="Calibri" pitchFamily="34" charset="-122"/>
                 <a:cs typeface="Calibri" pitchFamily="34" charset="-120"/>
               </a:rPr>
-              <a:t>To give something that is needed.</a:t>
+              <a:t>To say you will definitely do something.</a:t>
             </a:r>
             <a:endParaRPr lang="en-US" sz="1200" dirty="0"/>
           </a:p>
@@ -39749,7 +39722,7 @@
                 <a:ea typeface="Trebuchet MS" pitchFamily="34" charset="-122"/>
                 <a:cs typeface="Trebuchet MS" pitchFamily="34" charset="-120"/>
               </a:rPr>
-              <a:t>promote</a:t>
+              <a:t>produce</a:t>
             </a:r>
             <a:endParaRPr lang="en-US" sz="1200" dirty="0"/>
           </a:p>
@@ -39815,7 +39788,7 @@
                 <a:ea typeface="Calibri" pitchFamily="34" charset="-122"/>
                 <a:cs typeface="Calibri" pitchFamily="34" charset="-120"/>
               </a:rPr>
-              <a:t>A planned piece of work, or to throw something forward.</a:t>
+              <a:t>To support something or move it forward, or to give someone a higher position.</a:t>
             </a:r>
             <a:endParaRPr lang="en-US" sz="1200" dirty="0"/>
           </a:p>
@@ -39888,7 +39861,7 @@
                 <a:ea typeface="Trebuchet MS" pitchFamily="34" charset="-122"/>
                 <a:cs typeface="Trebuchet MS" pitchFamily="34" charset="-120"/>
               </a:rPr>
-              <a:t>provide</a:t>
+              <a:t>promise</a:t>
             </a:r>
             <a:endParaRPr lang="en-US" sz="1200" dirty="0"/>
           </a:p>
@@ -40246,7 +40219,7 @@
                 <a:ea typeface="Calibri" pitchFamily="34" charset="-122"/>
                 <a:cs typeface="Calibri" pitchFamily="34" charset="-120"/>
               </a:rPr>
-              <a:t>Word Labs  •  wordlabs.app  •  Prefix: 'pro-' = forward, in favour of</a:t>
+              <a:t>Word Labs  •  wordlabs.app  •  Prefix: 'pro-' = forward, before, in favour of</a:t>
             </a:r>
             <a:endParaRPr lang="en-US" sz="800" dirty="0"/>
           </a:p>
@@ -40449,7 +40422,7 @@
                 <a:ea typeface="Calibri" pitchFamily="34" charset="-122"/>
                 <a:cs typeface="Calibri" pitchFamily="34" charset="-120"/>
               </a:rPr>
-              <a:t>The scientist worked hard to produce a solution that would protect the environment.</a:t>
+              <a:t>The students worked hard to make progress on their science project.</a:t>
             </a:r>
             <a:endParaRPr lang="en-US" sz="1500" dirty="0"/>
           </a:p>
@@ -40613,7 +40586,7 @@
                 <a:ea typeface="Calibri" pitchFamily="34" charset="-122"/>
                 <a:cs typeface="Calibri" pitchFamily="34" charset="-120"/>
               </a:rPr>
-              <a:t>Our class will present a project about the progress of space exploration.</a:t>
+              <a:t>It is important to protect native animals in Australia.</a:t>
             </a:r>
             <a:endParaRPr lang="en-US" sz="1500" dirty="0"/>
           </a:p>
@@ -40777,7 +40750,7 @@
                 <a:ea typeface="Calibri" pitchFamily="34" charset="-122"/>
                 <a:cs typeface="Calibri" pitchFamily="34" charset="-120"/>
               </a:rPr>
-              <a:t>The community gathered to protest against the plan to cut down the old trees.</a:t>
+              <a:t>The school will promote healthy eating during the sports carnival.</a:t>
             </a:r>
             <a:endParaRPr lang="en-US" sz="1500" dirty="0"/>
           </a:p>
